--- a/downloads/DCT_V1_Ch15_Slides.pptx
+++ b/downloads/DCT_V1_Ch15_Slides.pptx
@@ -130,7 +130,7 @@
   <p:extLst>
     <p:ext uri="{521415D9-36F7-43E2-AB2F-B90AF26B5E84}">
       <p14:sectionLst xmlns:p14="http://schemas.microsoft.com/office/powerpoint/2010/main">
-        <p14:section name="Opening" id="{997fb2fd-0746-a5cb-c4cd-0e73f542f329}">
+        <p14:section name="Opening" id="{8389ecfb-61df-53c3-29b5-5b1c87202e96}">
           <p14:sldIdLst>
             <p14:sldId id="256"/>
             <p14:sldId id="257"/>
@@ -138,50 +138,50 @@
             <p14:sldId id="259"/>
           </p14:sldIdLst>
         </p14:section>
-        <p14:section name="15.1 Why Enterprise Optimization?" id="{a42cc0f2-c305-880d-2d90-9b05b26654be}">
+        <p14:section name="15.1 Why Enterprise Optimization?" id="{382db414-14a0-a5e4-25b4-e429d98a9bf8}">
           <p14:sldIdLst>
             <p14:sldId id="260"/>
           </p14:sldIdLst>
         </p14:section>
-        <p14:section name="15.2 The Problem, Stated" id="{7c2d8df0-7032-4425-ece7-2b8f6564225f}">
+        <p14:section name="15.2 The Problem, Stated" id="{d6930fc2-c9a9-011d-372a-d55e848e2f8a}">
           <p14:sldIdLst>
             <p14:sldId id="261"/>
             <p14:sldId id="262"/>
           </p14:sldIdLst>
         </p14:section>
-        <p14:section name="15.3 Decisions, Objectives, and Commitments" id="{2f4aa0f1-383a-5882-68c6-2f8b2a8b79b6}">
+        <p14:section name="15.3 Decisions, Objectives, and Commitments" id="{addffd22-47dd-b2f3-864d-b692898f267b}">
           <p14:sldIdLst>
             <p14:sldId id="263"/>
           </p14:sldIdLst>
         </p14:section>
-        <p14:section name="15.4 Feasibility Before Optimality" id="{09fd0cd6-74f0-bc90-8300-a06f6cdda4da}">
+        <p14:section name="15.4 Feasibility Before Optimality" id="{295546d8-95a2-1ea6-4c59-7412c5cf0b71}">
           <p14:sldIdLst>
             <p14:sldId id="264"/>
           </p14:sldIdLst>
         </p14:section>
-        <p14:section name="15.5 Optimality Conditions and Shadow Prices" id="{2516bc54-7d33-dcb2-12e5-bd86d22483f1}">
+        <p14:section name="15.5 Optimality Conditions and Shadow Prices" id="{6985dc13-bee0-9358-aab3-9077b805ac00}">
           <p14:sldIdLst>
             <p14:sldId id="265"/>
           </p14:sldIdLst>
         </p14:section>
-        <p14:section name="15.6 Time, Uncertainty, and Rules" id="{173ce590-bcb5-232b-2e79-b56592ca84e1}">
+        <p14:section name="15.6 Time, Uncertainty, and Rules" id="{07a95eab-9ee6-62fe-5caa-081ff8054bec}">
           <p14:sldIdLst>
             <p14:sldId id="266"/>
             <p14:sldId id="267"/>
           </p14:sldIdLst>
         </p14:section>
-        <p14:section name="15.7 Multiple Objectives and the Efficiency Frontier" id="{8f628921-7857-9b32-cf3d-c67303aef53a}">
+        <p14:section name="15.7 Multiple Objectives and the Efficiency Frontier" id="{f62bfa19-af62-97b1-dbdf-e5e7eb2d5dad}">
           <p14:sldIdLst>
             <p14:sldId id="268"/>
           </p14:sldIdLst>
         </p14:section>
-        <p14:section name="15.8 Architecture, Holdability, and the Unified Theorem" id="{890bfab1-57f7-78b1-8d5c-2ac0bbf74d80}">
+        <p14:section name="15.8 Architecture, Holdability, and the Unified Theorem" id="{7daabed9-8aa7-fa7e-cf39-39436460fb61}">
           <p14:sldIdLst>
             <p14:sldId id="269"/>
             <p14:sldId id="270"/>
           </p14:sldIdLst>
         </p14:section>
-        <p14:section name="Worked Example 15.1" id="{98e6c315-58f3-a897-f666-868b12c5baa3}">
+        <p14:section name="Worked Example 15.1" id="{f212aa41-a7c2-893b-3849-0c5b4f0cf54c}">
           <p14:sldIdLst>
             <p14:sldId id="271"/>
             <p14:sldId id="272"/>
@@ -190,12 +190,12 @@
             <p14:sldId id="275"/>
           </p14:sldIdLst>
         </p14:section>
-        <p14:section name="AXIOM Lab 1.15" id="{114496f3-c9ac-2c27-3dd4-ae64721a1fac}">
+        <p14:section name="AXIOM Lab 1.15" id="{40555a3b-0746-0709-7180-ca62345c1d36}">
           <p14:sldIdLst>
             <p14:sldId id="276"/>
           </p14:sldIdLst>
         </p14:section>
-        <p14:section name="Close" id="{cd6364ee-de43-81de-01c2-5152e6b1ed04}">
+        <p14:section name="Close" id="{d07ae25c-e05e-9c54-bb4e-11f86c454be5}">
           <p14:sldIdLst>
             <p14:sldId id="277"/>
             <p14:sldId id="278"/>

--- a/downloads/DCT_V1_Ch15_Slides.pptx
+++ b/downloads/DCT_V1_Ch15_Slides.pptx
@@ -130,7 +130,7 @@
   <p:extLst>
     <p:ext uri="{521415D9-36F7-43E2-AB2F-B90AF26B5E84}">
       <p14:sectionLst xmlns:p14="http://schemas.microsoft.com/office/powerpoint/2010/main">
-        <p14:section name="Opening" id="{8389ecfb-61df-53c3-29b5-5b1c87202e96}">
+        <p14:section name="Opening" id="{59b44add-2d01-8187-dd37-ca614f6b0453}">
           <p14:sldIdLst>
             <p14:sldId id="256"/>
             <p14:sldId id="257"/>
@@ -138,50 +138,50 @@
             <p14:sldId id="259"/>
           </p14:sldIdLst>
         </p14:section>
-        <p14:section name="15.1 Why Enterprise Optimization?" id="{382db414-14a0-a5e4-25b4-e429d98a9bf8}">
+        <p14:section name="15.1 Why Enterprise Optimization?" id="{771c7dd7-9f2e-b1e3-cdbe-488a0bff0d33}">
           <p14:sldIdLst>
             <p14:sldId id="260"/>
           </p14:sldIdLst>
         </p14:section>
-        <p14:section name="15.2 The Problem, Stated" id="{d6930fc2-c9a9-011d-372a-d55e848e2f8a}">
+        <p14:section name="15.2 The Problem, Stated" id="{711a22a6-23e9-b45a-69ad-47fdadbe65ee}">
           <p14:sldIdLst>
             <p14:sldId id="261"/>
             <p14:sldId id="262"/>
           </p14:sldIdLst>
         </p14:section>
-        <p14:section name="15.3 Decisions, Objectives, and Commitments" id="{addffd22-47dd-b2f3-864d-b692898f267b}">
+        <p14:section name="15.3 Decisions, Objectives, and Commitments" id="{6d30a205-ad72-cc72-9699-3589c492091d}">
           <p14:sldIdLst>
             <p14:sldId id="263"/>
           </p14:sldIdLst>
         </p14:section>
-        <p14:section name="15.4 Feasibility Before Optimality" id="{295546d8-95a2-1ea6-4c59-7412c5cf0b71}">
+        <p14:section name="15.4 Feasibility Before Optimality" id="{3f031f1b-2346-c3df-e767-55a132e3283d}">
           <p14:sldIdLst>
             <p14:sldId id="264"/>
           </p14:sldIdLst>
         </p14:section>
-        <p14:section name="15.5 Optimality Conditions and Shadow Prices" id="{6985dc13-bee0-9358-aab3-9077b805ac00}">
+        <p14:section name="15.5 Optimality Conditions and Shadow Prices" id="{697e0c22-ba83-dff7-a282-75367a84b816}">
           <p14:sldIdLst>
             <p14:sldId id="265"/>
           </p14:sldIdLst>
         </p14:section>
-        <p14:section name="15.6 Time, Uncertainty, and Rules" id="{07a95eab-9ee6-62fe-5caa-081ff8054bec}">
+        <p14:section name="15.6 Time, Uncertainty, and Rules" id="{6faaa63e-3d0a-14bd-ac02-e61665508d8a}">
           <p14:sldIdLst>
             <p14:sldId id="266"/>
             <p14:sldId id="267"/>
           </p14:sldIdLst>
         </p14:section>
-        <p14:section name="15.7 Multiple Objectives and the Efficiency Frontier" id="{f62bfa19-af62-97b1-dbdf-e5e7eb2d5dad}">
+        <p14:section name="15.7 Multiple Objectives and the Efficiency Frontier" id="{d72c6063-eca7-fdb3-5a46-90669b14e0df}">
           <p14:sldIdLst>
             <p14:sldId id="268"/>
           </p14:sldIdLst>
         </p14:section>
-        <p14:section name="15.8 Architecture, Holdability, and the Unified Theorem" id="{7daabed9-8aa7-fa7e-cf39-39436460fb61}">
+        <p14:section name="15.8 Architecture, Holdability, and the Unified Theorem" id="{1702b0cc-00b5-7fe1-5a8f-22b3df18160a}">
           <p14:sldIdLst>
             <p14:sldId id="269"/>
             <p14:sldId id="270"/>
           </p14:sldIdLst>
         </p14:section>
-        <p14:section name="Worked Example 15.1" id="{f212aa41-a7c2-893b-3849-0c5b4f0cf54c}">
+        <p14:section name="Worked Example 15.1" id="{fc5a5b6e-3a95-07c3-1489-95fab4bf4872}">
           <p14:sldIdLst>
             <p14:sldId id="271"/>
             <p14:sldId id="272"/>
@@ -190,12 +190,12 @@
             <p14:sldId id="275"/>
           </p14:sldIdLst>
         </p14:section>
-        <p14:section name="AXIOM Lab 1.15" id="{40555a3b-0746-0709-7180-ca62345c1d36}">
+        <p14:section name="AXIOM Lab 1.15" id="{a8d4466b-1448-22a8-b7ab-983594b7dbb2}">
           <p14:sldIdLst>
             <p14:sldId id="276"/>
           </p14:sldIdLst>
         </p14:section>
-        <p14:section name="Close" id="{d07ae25c-e05e-9c54-bb4e-11f86c454be5}">
+        <p14:section name="Close" id="{e881d911-ea68-060e-b172-edb4040aa4d9}">
           <p14:sldIdLst>
             <p14:sldId id="277"/>
             <p14:sldId id="278"/>
